--- a/lecons/F1/15_F1_M3_L09_Atmospheric_Disturbances.pptx
+++ b/lecons/F1/15_F1_M3_L09_Atmospheric_Disturbances.pptx
@@ -3467,7 +3467,7 @@
           <a:p>
             <a:r>
               <a:rPr lang="en-US" dirty="0"/>
-              <a:t>Before we start the new lesson, let us correct the homework I gave you at the end of Lesson 8: Atmospheric Circulation. The question was: Observe the wind for three days and write its direction and whether it is dry or moist. Take out your exercise books.</a:t>
+              <a:t>Before we start the new lesson, let us correct the homework I gave you at the end of Lesson 8: Atmospheric Circulation. The question was: Name three types of atmospheric disturbances. Take out your exercise books.</a:t>
             </a:r>
             <a:endParaRPr lang="en-US" dirty="0"/>
           </a:p>
@@ -4435,7 +4435,7 @@
           <a:p>
             <a:r>
               <a:rPr lang="en-US" dirty="0"/>
-              <a:t>Here is a good answer. In the dry season the wind blows from the north-east and is dry and dusty (Harmattan); in the rainy season it blows from the south-west and is moist. Compare it with your own answer and correct your work in red.</a:t>
+              <a:t>Here is a good answer. Thunderstorms, cyclones and dust storms (also torrential rain and drizzle). Compare it with your own answer and correct your work in red.</a:t>
             </a:r>
             <a:endParaRPr lang="en-US" dirty="0"/>
           </a:p>
@@ -4963,7 +4963,7 @@
           <a:p>
             <a:r>
               <a:rPr lang="en-US" dirty="0"/>
-              <a:t>For your homework: Write three safety rules for your family during a thunderstorm. We shall correct it at the beginning of our next lesson.</a:t>
+              <a:t>For your homework: Name two atmospheric disturbances that affect Cameroon. We shall correct it at the beginning of our next lesson.</a:t>
             </a:r>
             <a:endParaRPr lang="en-US" dirty="0"/>
           </a:p>
@@ -15939,7 +15939,7 @@
                 <a:ea typeface="Times New Roman" pitchFamily="34" charset="-122"/>
                 <a:cs typeface="Times New Roman" pitchFamily="34" charset="-120"/>
               </a:rPr>
-              <a:t>Observe the wind for three days and write its direction and whether it is dry or moist.</a:t>
+              <a:t>Name three types of atmospheric disturbances.</a:t>
             </a:r>
             <a:endParaRPr lang="en-US" sz="4000" dirty="0"/>
           </a:p>
@@ -18923,7 +18923,7 @@
                 <a:ea typeface="Times New Roman" pitchFamily="34" charset="-122"/>
                 <a:cs typeface="Times New Roman" pitchFamily="34" charset="-120"/>
               </a:rPr>
-              <a:t>In the dry season the wind blows from the north-east and is dry and dusty (Harmattan); in the rainy season it blows from the south-west and is moist.</a:t>
+              <a:t>Thunderstorms, cyclones and dust storms (also torrential rain and drizzle).</a:t>
             </a:r>
             <a:endParaRPr lang="en-US" sz="4000" dirty="0"/>
           </a:p>
@@ -20303,7 +20303,7 @@
                 <a:ea typeface="Times New Roman" pitchFamily="34" charset="-122"/>
                 <a:cs typeface="Times New Roman" pitchFamily="34" charset="-120"/>
               </a:rPr>
-              <a:t>Write three safety rules for your family during a thunderstorm.</a:t>
+              <a:t>Name two atmospheric disturbances that affect Cameroon.</a:t>
             </a:r>
             <a:endParaRPr lang="en-US" sz="4000" dirty="0"/>
           </a:p>
@@ -22967,7 +22967,7 @@
                           <a:ea typeface="Calibri" pitchFamily="34" charset="-122"/>
                           <a:cs typeface="Calibri" pitchFamily="34" charset="-120"/>
                         </a:rPr>
-                        <a:t>Write three safety rules for your family during a thunderstorm.</a:t>
+                        <a:t>Name two atmospheric disturbances that affect Cameroon.</a:t>
                       </a:r>
                       <a:endParaRPr lang="en-US" sz="1600" dirty="0">
                         <a:latin typeface="Calibri" charset="0"/>
